--- a/~sasano/lecture/pn2/26/P11.pptx
+++ b/~sasano/lecture/pn2/26/P11.pptx
@@ -240,7 +240,7 @@
             <a:fld id="{83402A8A-1359-4ECC-B713-69DA8037369C}" type="datetimeFigureOut">
               <a:rPr kumimoji="1" lang="ja-JP" altLang="en-US" smtClean="0"/>
               <a:pPr/>
-              <a:t>2025/12/9</a:t>
+              <a:t>2026/9/28</a:t>
             </a:fld>
             <a:endParaRPr kumimoji="1" lang="ja-JP" altLang="en-US"/>
           </a:p>
@@ -722,7 +722,7 @@
             <a:fld id="{E90ED720-0104-4369-84BC-D37694168613}" type="datetimeFigureOut">
               <a:rPr kumimoji="1" lang="ja-JP" altLang="en-US" smtClean="0"/>
               <a:pPr/>
-              <a:t>2025/12/9</a:t>
+              <a:t>2026/9/28</a:t>
             </a:fld>
             <a:endParaRPr kumimoji="1" lang="ja-JP" altLang="en-US"/>
           </a:p>
@@ -919,7 +919,7 @@
             <a:fld id="{E90ED720-0104-4369-84BC-D37694168613}" type="datetimeFigureOut">
               <a:rPr kumimoji="1" lang="ja-JP" altLang="en-US" smtClean="0"/>
               <a:pPr/>
-              <a:t>2025/12/9</a:t>
+              <a:t>2026/9/28</a:t>
             </a:fld>
             <a:endParaRPr kumimoji="1" lang="ja-JP" altLang="en-US"/>
           </a:p>
@@ -1126,7 +1126,7 @@
             <a:fld id="{E90ED720-0104-4369-84BC-D37694168613}" type="datetimeFigureOut">
               <a:rPr kumimoji="1" lang="ja-JP" altLang="en-US" smtClean="0"/>
               <a:pPr/>
-              <a:t>2025/12/9</a:t>
+              <a:t>2026/9/28</a:t>
             </a:fld>
             <a:endParaRPr kumimoji="1" lang="ja-JP" altLang="en-US"/>
           </a:p>
@@ -1323,7 +1323,7 @@
             <a:fld id="{E90ED720-0104-4369-84BC-D37694168613}" type="datetimeFigureOut">
               <a:rPr kumimoji="1" lang="ja-JP" altLang="en-US" smtClean="0"/>
               <a:pPr/>
-              <a:t>2025/12/9</a:t>
+              <a:t>2026/9/28</a:t>
             </a:fld>
             <a:endParaRPr kumimoji="1" lang="ja-JP" altLang="en-US"/>
           </a:p>
@@ -1565,7 +1565,7 @@
             <a:fld id="{E90ED720-0104-4369-84BC-D37694168613}" type="datetimeFigureOut">
               <a:rPr kumimoji="1" lang="ja-JP" altLang="en-US" smtClean="0"/>
               <a:pPr/>
-              <a:t>2025/12/9</a:t>
+              <a:t>2026/9/28</a:t>
             </a:fld>
             <a:endParaRPr kumimoji="1" lang="ja-JP" altLang="en-US"/>
           </a:p>
@@ -1911,7 +1911,7 @@
             <a:fld id="{E90ED720-0104-4369-84BC-D37694168613}" type="datetimeFigureOut">
               <a:rPr kumimoji="1" lang="ja-JP" altLang="en-US" smtClean="0"/>
               <a:pPr/>
-              <a:t>2025/12/9</a:t>
+              <a:t>2026/9/28</a:t>
             </a:fld>
             <a:endParaRPr kumimoji="1" lang="ja-JP" altLang="en-US"/>
           </a:p>
@@ -2391,7 +2391,7 @@
             <a:fld id="{E90ED720-0104-4369-84BC-D37694168613}" type="datetimeFigureOut">
               <a:rPr kumimoji="1" lang="ja-JP" altLang="en-US" smtClean="0"/>
               <a:pPr/>
-              <a:t>2025/12/9</a:t>
+              <a:t>2026/9/28</a:t>
             </a:fld>
             <a:endParaRPr kumimoji="1" lang="ja-JP" altLang="en-US"/>
           </a:p>
@@ -2505,7 +2505,7 @@
             <a:fld id="{E90ED720-0104-4369-84BC-D37694168613}" type="datetimeFigureOut">
               <a:rPr kumimoji="1" lang="ja-JP" altLang="en-US" smtClean="0"/>
               <a:pPr/>
-              <a:t>2025/12/9</a:t>
+              <a:t>2026/9/28</a:t>
             </a:fld>
             <a:endParaRPr kumimoji="1" lang="ja-JP" altLang="en-US"/>
           </a:p>
@@ -2597,7 +2597,7 @@
             <a:fld id="{E90ED720-0104-4369-84BC-D37694168613}" type="datetimeFigureOut">
               <a:rPr kumimoji="1" lang="ja-JP" altLang="en-US" smtClean="0"/>
               <a:pPr/>
-              <a:t>2025/12/9</a:t>
+              <a:t>2026/9/28</a:t>
             </a:fld>
             <a:endParaRPr kumimoji="1" lang="ja-JP" altLang="en-US"/>
           </a:p>
@@ -2901,7 +2901,7 @@
             <a:fld id="{E90ED720-0104-4369-84BC-D37694168613}" type="datetimeFigureOut">
               <a:rPr kumimoji="1" lang="ja-JP" altLang="en-US" smtClean="0"/>
               <a:pPr/>
-              <a:t>2025/12/9</a:t>
+              <a:t>2026/9/28</a:t>
             </a:fld>
             <a:endParaRPr kumimoji="1" lang="ja-JP" altLang="en-US"/>
           </a:p>
@@ -3150,7 +3150,7 @@
             <a:fld id="{E90ED720-0104-4369-84BC-D37694168613}" type="datetimeFigureOut">
               <a:rPr kumimoji="1" lang="ja-JP" altLang="en-US" smtClean="0"/>
               <a:pPr/>
-              <a:t>2025/12/9</a:t>
+              <a:t>2026/9/28</a:t>
             </a:fld>
             <a:endParaRPr kumimoji="1" lang="ja-JP" altLang="en-US"/>
           </a:p>
@@ -3390,7 +3390,7 @@
             <a:fld id="{E90ED720-0104-4369-84BC-D37694168613}" type="datetimeFigureOut">
               <a:rPr kumimoji="1" lang="ja-JP" altLang="en-US" smtClean="0"/>
               <a:pPr/>
-              <a:t>2025/12/9</a:t>
+              <a:t>2026/9/28</a:t>
             </a:fld>
             <a:endParaRPr kumimoji="1" lang="ja-JP" altLang="en-US"/>
           </a:p>
@@ -3829,8 +3829,8 @@
         </p:nvSpPr>
         <p:spPr>
           <a:xfrm>
-            <a:off x="2571736" y="5143512"/>
-            <a:ext cx="3534942" cy="523220"/>
+            <a:off x="3821634" y="5373216"/>
+            <a:ext cx="1500732" cy="523220"/>
           </a:xfrm>
           <a:prstGeom prst="rect">
             <a:avLst/>
@@ -3843,9 +3843,14 @@
           </a:bodyPr>
           <a:lstStyle/>
           <a:p>
+            <a:pPr algn="ctr"/>
+            <a:r>
+              <a:rPr kumimoji="1" lang="ja-JP" altLang="en-US" sz="2800"/>
+              <a:t>篠埜　</a:t>
+            </a:r>
             <a:r>
               <a:rPr kumimoji="1" lang="ja-JP" altLang="en-US" sz="2800" dirty="0"/>
-              <a:t>情報工学科　篠埜　功</a:t>
+              <a:t>功</a:t>
             </a:r>
           </a:p>
         </p:txBody>
